--- a/data/deep_dives/carteira_listo_lf_iii_e1123990/exports/documentary_comparison.pptx
+++ b/data/deep_dives/carteira_listo_lf_iii_e1123990/exports/documentary_comparison.pptx
@@ -4281,7 +4281,7 @@
                       <a:r>
                         <a:rPr sz="1300" b="1">
                           <a:solidFill>
-                            <a:srgbClr val="1F1F1F"/>
+                            <a:srgbClr val="FFFFFF"/>
                           </a:solidFill>
                           <a:latin typeface="Calibri"/>
                         </a:rPr>
@@ -4291,7 +4291,7 @@
                   </a:txBody>
                   <a:tcPr marL="91440" marR="91440" marT="41148" marB="41148" anchor="ctr">
                     <a:solidFill>
-                      <a:srgbClr val="EC7000"/>
+                      <a:srgbClr val="FF6200"/>
                     </a:solidFill>
                     <a:lnL>
                       <a:noFill/>
@@ -4330,7 +4330,7 @@
                       <a:r>
                         <a:rPr sz="1300" b="1">
                           <a:solidFill>
-                            <a:srgbClr val="1F1F1F"/>
+                            <a:srgbClr val="FFFFFF"/>
                           </a:solidFill>
                           <a:latin typeface="Calibri"/>
                         </a:rPr>
@@ -4340,7 +4340,7 @@
                   </a:txBody>
                   <a:tcPr marL="91440" marR="91440" marT="41148" marB="41148" anchor="ctr">
                     <a:solidFill>
-                      <a:srgbClr val="EC7000"/>
+                      <a:srgbClr val="FF6200"/>
                     </a:solidFill>
                     <a:lnL>
                       <a:noFill/>
@@ -4720,7 +4720,7 @@
                           </a:solidFill>
                           <a:latin typeface="Calibri"/>
                         </a:rPr>
-                        <a:t>Não localizado nas cláusulas revisadas; requer documento aplicável</a:t>
+                        <a:t>-</a:t>
                       </a:r>
                     </a:p>
                   </a:txBody>
@@ -5140,7 +5140,7 @@
                       <a:r>
                         <a:rPr sz="1300" b="1">
                           <a:solidFill>
-                            <a:srgbClr val="1F1F1F"/>
+                            <a:srgbClr val="FFFFFF"/>
                           </a:solidFill>
                           <a:latin typeface="Calibri"/>
                         </a:rPr>
@@ -5150,7 +5150,7 @@
                   </a:txBody>
                   <a:tcPr marL="91440" marR="91440" marT="41148" marB="41148" anchor="ctr">
                     <a:solidFill>
-                      <a:srgbClr val="EC7000"/>
+                      <a:srgbClr val="FF6200"/>
                     </a:solidFill>
                     <a:lnL>
                       <a:noFill/>
@@ -5189,7 +5189,7 @@
                       <a:r>
                         <a:rPr sz="1300" b="1">
                           <a:solidFill>
-                            <a:srgbClr val="1F1F1F"/>
+                            <a:srgbClr val="FFFFFF"/>
                           </a:solidFill>
                           <a:latin typeface="Calibri"/>
                         </a:rPr>
@@ -5199,7 +5199,7 @@
                   </a:txBody>
                   <a:tcPr marL="91440" marR="91440" marT="41148" marB="41148" anchor="ctr">
                     <a:solidFill>
-                      <a:srgbClr val="EC7000"/>
+                      <a:srgbClr val="FF6200"/>
                     </a:solidFill>
                     <a:lnL>
                       <a:noFill/>
@@ -5409,7 +5409,7 @@
                           </a:solidFill>
                           <a:latin typeface="Calibri"/>
                         </a:rPr>
-                        <a:t>Não localizado nas cláusulas revisadas; requer documento aplicável</a:t>
+                        <a:t>-</a:t>
                       </a:r>
                     </a:p>
                   </a:txBody>
@@ -5505,7 +5505,7 @@
                           </a:solidFill>
                           <a:latin typeface="Calibri"/>
                         </a:rPr>
-                        <a:t>Não localizado nas cláusulas revisadas; requer documento aplicável</a:t>
+                        <a:t>-</a:t>
                       </a:r>
                     </a:p>
                   </a:txBody>
@@ -5699,7 +5699,7 @@
                           </a:solidFill>
                           <a:latin typeface="Calibri"/>
                         </a:rPr>
-                        <a:t>Não localizado nas cláusulas revisadas; requer documento aplicável</a:t>
+                        <a:t>-</a:t>
                       </a:r>
                     </a:p>
                   </a:txBody>
@@ -5903,7 +5903,7 @@
                       <a:r>
                         <a:rPr sz="1300" b="1">
                           <a:solidFill>
-                            <a:srgbClr val="1F1F1F"/>
+                            <a:srgbClr val="FFFFFF"/>
                           </a:solidFill>
                           <a:latin typeface="Calibri"/>
                         </a:rPr>
@@ -5913,7 +5913,7 @@
                   </a:txBody>
                   <a:tcPr marL="91440" marR="91440" marT="41148" marB="41148" anchor="ctr">
                     <a:solidFill>
-                      <a:srgbClr val="EC7000"/>
+                      <a:srgbClr val="FF6200"/>
                     </a:solidFill>
                     <a:lnL>
                       <a:noFill/>
@@ -5952,7 +5952,7 @@
                       <a:r>
                         <a:rPr sz="1300" b="1">
                           <a:solidFill>
-                            <a:srgbClr val="1F1F1F"/>
+                            <a:srgbClr val="FFFFFF"/>
                           </a:solidFill>
                           <a:latin typeface="Calibri"/>
                         </a:rPr>
@@ -5962,7 +5962,7 @@
                   </a:txBody>
                   <a:tcPr marL="91440" marR="91440" marT="41148" marB="41148" anchor="ctr">
                     <a:solidFill>
-                      <a:srgbClr val="EC7000"/>
+                      <a:srgbClr val="FF6200"/>
                     </a:solidFill>
                     <a:lnL>
                       <a:noFill/>
@@ -6246,7 +6246,7 @@
                           </a:solidFill>
                           <a:latin typeface="Calibri"/>
                         </a:rPr>
-                        <a:t>Não localizado nas cláusulas revisadas; requer documento aplicável</a:t>
+                        <a:t>-</a:t>
                       </a:r>
                     </a:p>
                   </a:txBody>
@@ -6536,7 +6536,7 @@
                           </a:solidFill>
                           <a:latin typeface="Calibri"/>
                         </a:rPr>
-                        <a:t>Não localizado nas cláusulas revisadas; requer documento aplicável</a:t>
+                        <a:t>-</a:t>
                       </a:r>
                     </a:p>
                   </a:txBody>
@@ -6740,7 +6740,7 @@
                       <a:r>
                         <a:rPr sz="1300" b="1">
                           <a:solidFill>
-                            <a:srgbClr val="1F1F1F"/>
+                            <a:srgbClr val="FFFFFF"/>
                           </a:solidFill>
                           <a:latin typeface="Calibri"/>
                         </a:rPr>
@@ -6750,7 +6750,7 @@
                   </a:txBody>
                   <a:tcPr marL="91440" marR="91440" marT="41148" marB="41148" anchor="ctr">
                     <a:solidFill>
-                      <a:srgbClr val="EC7000"/>
+                      <a:srgbClr val="FF6200"/>
                     </a:solidFill>
                     <a:lnL>
                       <a:noFill/>
@@ -6789,7 +6789,7 @@
                       <a:r>
                         <a:rPr sz="1300" b="1">
                           <a:solidFill>
-                            <a:srgbClr val="1F1F1F"/>
+                            <a:srgbClr val="FFFFFF"/>
                           </a:solidFill>
                           <a:latin typeface="Calibri"/>
                         </a:rPr>
@@ -6799,7 +6799,7 @@
                   </a:txBody>
                   <a:tcPr marL="91440" marR="91440" marT="41148" marB="41148" anchor="ctr">
                     <a:solidFill>
-                      <a:srgbClr val="EC7000"/>
+                      <a:srgbClr val="FF6200"/>
                     </a:solidFill>
                     <a:lnL>
                       <a:noFill/>
@@ -6987,7 +6987,7 @@
                           </a:solidFill>
                           <a:latin typeface="Calibri"/>
                         </a:rPr>
-                        <a:t>Spread final não localizado nas cláusulas revisadas; requer suplemento ou ato específico</a:t>
+                        <a:t>-</a:t>
                       </a:r>
                     </a:p>
                   </a:txBody>
@@ -7181,7 +7181,7 @@
                           </a:solidFill>
                           <a:latin typeface="Calibri"/>
                         </a:rPr>
-                        <a:t>Não localizado nas cláusulas revisadas; requer documento aplicável</a:t>
+                        <a:t>-</a:t>
                       </a:r>
                     </a:p>
                   </a:txBody>
@@ -7385,7 +7385,7 @@
                       <a:r>
                         <a:rPr sz="1300" b="1">
                           <a:solidFill>
-                            <a:srgbClr val="1F1F1F"/>
+                            <a:srgbClr val="FFFFFF"/>
                           </a:solidFill>
                           <a:latin typeface="Calibri"/>
                         </a:rPr>
@@ -7395,7 +7395,7 @@
                   </a:txBody>
                   <a:tcPr marL="91440" marR="91440" marT="41148" marB="41148" anchor="ctr">
                     <a:solidFill>
-                      <a:srgbClr val="EC7000"/>
+                      <a:srgbClr val="FF6200"/>
                     </a:solidFill>
                     <a:lnL>
                       <a:noFill/>
@@ -7434,7 +7434,7 @@
                       <a:r>
                         <a:rPr sz="1300" b="1">
                           <a:solidFill>
-                            <a:srgbClr val="1F1F1F"/>
+                            <a:srgbClr val="FFFFFF"/>
                           </a:solidFill>
                           <a:latin typeface="Calibri"/>
                         </a:rPr>
@@ -7444,7 +7444,7 @@
                   </a:txBody>
                   <a:tcPr marL="91440" marR="91440" marT="41148" marB="41148" anchor="ctr">
                     <a:solidFill>
-                      <a:srgbClr val="EC7000"/>
+                      <a:srgbClr val="FF6200"/>
                     </a:solidFill>
                     <a:lnL>
                       <a:noFill/>
@@ -7536,7 +7536,7 @@
                           </a:solidFill>
                           <a:latin typeface="Calibri"/>
                         </a:rPr>
-                        <a:t>Não localizado nas cláusulas revisadas; requer documento aplicável</a:t>
+                        <a:t>-</a:t>
                       </a:r>
                     </a:p>
                   </a:txBody>
@@ -7632,7 +7632,7 @@
                           </a:solidFill>
                           <a:latin typeface="Calibri"/>
                         </a:rPr>
-                        <a:t>Não localizado nas cláusulas revisadas; requer documento aplicável</a:t>
+                        <a:t>-</a:t>
                       </a:r>
                     </a:p>
                   </a:txBody>
@@ -7730,7 +7730,7 @@
                           </a:solidFill>
                           <a:latin typeface="Calibri"/>
                         </a:rPr>
-                        <a:t>Não localizado nas cláusulas revisadas; requer documento aplicável</a:t>
+                        <a:t>-</a:t>
                       </a:r>
                     </a:p>
                   </a:txBody>
@@ -7934,7 +7934,7 @@
                       <a:r>
                         <a:rPr sz="1300" b="1">
                           <a:solidFill>
-                            <a:srgbClr val="1F1F1F"/>
+                            <a:srgbClr val="FFFFFF"/>
                           </a:solidFill>
                           <a:latin typeface="Calibri"/>
                         </a:rPr>
@@ -7944,7 +7944,7 @@
                   </a:txBody>
                   <a:tcPr marL="91440" marR="91440" marT="41148" marB="41148" anchor="ctr">
                     <a:solidFill>
-                      <a:srgbClr val="EC7000"/>
+                      <a:srgbClr val="FF6200"/>
                     </a:solidFill>
                     <a:lnL>
                       <a:noFill/>
@@ -7983,7 +7983,7 @@
                       <a:r>
                         <a:rPr sz="1300" b="1">
                           <a:solidFill>
-                            <a:srgbClr val="1F1F1F"/>
+                            <a:srgbClr val="FFFFFF"/>
                           </a:solidFill>
                           <a:latin typeface="Calibri"/>
                         </a:rPr>
@@ -7993,7 +7993,7 @@
                   </a:txBody>
                   <a:tcPr marL="91440" marR="91440" marT="41148" marB="41148" anchor="ctr">
                     <a:solidFill>
-                      <a:srgbClr val="EC7000"/>
+                      <a:srgbClr val="FF6200"/>
                     </a:solidFill>
                     <a:lnL>
                       <a:noFill/>
@@ -8181,7 +8181,7 @@
                           </a:solidFill>
                           <a:latin typeface="Calibri"/>
                         </a:rPr>
-                        <a:t>Parcela da taxa conjunta; rateio no Acordo Operacional não acessível</a:t>
+                        <a:t>Parcela da taxa conjunta</a:t>
                       </a:r>
                     </a:p>
                   </a:txBody>
@@ -8483,7 +8483,7 @@
                       <a:r>
                         <a:rPr sz="1300" b="1">
                           <a:solidFill>
-                            <a:srgbClr val="1F1F1F"/>
+                            <a:srgbClr val="FFFFFF"/>
                           </a:solidFill>
                           <a:latin typeface="Calibri"/>
                         </a:rPr>
@@ -8493,7 +8493,7 @@
                   </a:txBody>
                   <a:tcPr marL="91440" marR="91440" marT="41148" marB="41148" anchor="ctr">
                     <a:solidFill>
-                      <a:srgbClr val="EC7000"/>
+                      <a:srgbClr val="FF6200"/>
                     </a:solidFill>
                     <a:lnL>
                       <a:noFill/>
@@ -8532,7 +8532,7 @@
                       <a:r>
                         <a:rPr sz="1300" b="1">
                           <a:solidFill>
-                            <a:srgbClr val="1F1F1F"/>
+                            <a:srgbClr val="FFFFFF"/>
                           </a:solidFill>
                           <a:latin typeface="Calibri"/>
                         </a:rPr>
@@ -8542,7 +8542,7 @@
                   </a:txBody>
                   <a:tcPr marL="91440" marR="91440" marT="41148" marB="41148" anchor="ctr">
                     <a:solidFill>
-                      <a:srgbClr val="EC7000"/>
+                      <a:srgbClr val="FF6200"/>
                     </a:solidFill>
                     <a:lnL>
                       <a:noFill/>
@@ -8656,7 +8656,7 @@
                           </a:solidFill>
                           <a:latin typeface="Calibri"/>
                         </a:rPr>
-                        <a:t>DC/PL e composição de cotas ajudam; validar numerador, denominador e versão contratual</a:t>
+                        <a:t>DC/PL e composição de cotas ajudam</a:t>
                       </a:r>
                     </a:p>
                   </a:txBody>
@@ -8946,7 +8946,7 @@
                           </a:solidFill>
                           <a:latin typeface="Calibri"/>
                         </a:rPr>
-                        <a:t>Sem competência IME carregada em cache local</a:t>
+                        <a:t>-</a:t>
                       </a:r>
                     </a:p>
                   </a:txBody>
